--- a/개별_ppt/07. 평가프레임.pptx
+++ b/개별_ppt/07. 평가프레임.pptx
@@ -842,7 +842,7 @@
         </p:nvSpPr>
         <p:spPr>
           <a:xfrm>
-            <a:off x="480577" y="2969670"/>
+            <a:off x="480577" y="3041862"/>
             <a:ext cx="4664593" cy="3506300"/>
           </a:xfrm>
           <a:prstGeom prst="roundRect">
@@ -1040,7 +1040,7 @@
         </p:nvGrpSpPr>
         <p:grpSpPr>
           <a:xfrm>
-            <a:off x="454792" y="1851214"/>
+            <a:off x="454792" y="1875278"/>
             <a:ext cx="2670048" cy="896112"/>
             <a:chOff x="502920" y="1627632"/>
             <a:chExt cx="2670048" cy="896112"/>
@@ -1412,7 +1412,7 @@
         </p:nvGrpSpPr>
         <p:grpSpPr>
           <a:xfrm>
-            <a:off x="3321195" y="1851214"/>
+            <a:off x="3321195" y="1875278"/>
             <a:ext cx="2670048" cy="896112"/>
             <a:chOff x="3310128" y="1627632"/>
             <a:chExt cx="2670048" cy="896112"/>
@@ -1806,7 +1806,7 @@
         </p:nvGrpSpPr>
         <p:grpSpPr>
           <a:xfrm>
-            <a:off x="9054002" y="1851214"/>
+            <a:off x="9054002" y="1875278"/>
             <a:ext cx="2670048" cy="896112"/>
             <a:chOff x="8869680" y="1627632"/>
             <a:chExt cx="2670048" cy="896112"/>
@@ -2212,13 +2212,13 @@
           <p:nvPr>
             <p:extLst>
               <p:ext uri="{D42A27DB-BD31-4B8C-83A1-F6EECF244321}">
-                <p14:modId xmlns:p14="http://schemas.microsoft.com/office/powerpoint/2010/main" val="2785153847"/>
+                <p14:modId xmlns:p14="http://schemas.microsoft.com/office/powerpoint/2010/main" val="1204976893"/>
               </p:ext>
             </p:extLst>
           </p:nvPr>
         </p:nvGraphicFramePr>
         <p:xfrm>
-          <a:off x="506794" y="3429000"/>
+          <a:off x="506794" y="3501192"/>
           <a:ext cx="4601116" cy="2966550"/>
         </p:xfrm>
         <a:graphic>
@@ -2228,14 +2228,14 @@
                 <a:tableStyleId>{5C22544A-7EE6-4342-B048-85BDC9FD1C3A}</a:tableStyleId>
               </a:tblPr>
               <a:tblGrid>
-                <a:gridCol w="1322083">
+                <a:gridCol w="1436306">
                   <a:extLst>
                     <a:ext uri="{9D8B030D-6E8A-4147-A177-3AD203B41FA5}">
                       <a16:colId xmlns:a16="http://schemas.microsoft.com/office/drawing/2014/main" val="20000"/>
                     </a:ext>
                   </a:extLst>
                 </a:gridCol>
-                <a:gridCol w="1855475">
+                <a:gridCol w="1741252">
                   <a:extLst>
                     <a:ext uri="{9D8B030D-6E8A-4147-A177-3AD203B41FA5}">
                       <a16:colId xmlns:a16="http://schemas.microsoft.com/office/drawing/2014/main" val="20001"/>
@@ -2418,7 +2418,7 @@
                         </a:lnSpc>
                       </a:pPr>
                       <a:r>
-                        <a:rPr sz="1000" b="0" err="1">
+                        <a:rPr sz="900" b="0" err="1">
                           <a:solidFill>
                             <a:srgbClr val="1F2A44"/>
                           </a:solidFill>
@@ -2429,7 +2429,7 @@
                         <a:t>언어모델</a:t>
                       </a:r>
                       <a:r>
-                        <a:rPr sz="1000" b="0">
+                        <a:rPr sz="900" b="0">
                           <a:solidFill>
                             <a:srgbClr val="1F2A44"/>
                           </a:solidFill>
@@ -2440,7 +2440,7 @@
                         <a:t> </a:t>
                       </a:r>
                       <a:r>
-                        <a:rPr sz="1000" b="0" err="1">
+                        <a:rPr sz="900" b="0" err="1">
                           <a:solidFill>
                             <a:srgbClr val="1F2A44"/>
                           </a:solidFill>
@@ -2451,7 +2451,7 @@
                         <a:t>품질·학습</a:t>
                       </a:r>
                       <a:r>
-                        <a:rPr sz="1000" b="0">
+                        <a:rPr sz="900" b="0">
                           <a:solidFill>
                             <a:srgbClr val="1F2A44"/>
                           </a:solidFill>
@@ -2462,7 +2462,7 @@
                         <a:t> </a:t>
                       </a:r>
                       <a:r>
-                        <a:rPr sz="1000" b="0" err="1">
+                        <a:rPr sz="900" b="0" err="1">
                           <a:solidFill>
                             <a:srgbClr val="1F2A44"/>
                           </a:solidFill>
@@ -2472,7 +2472,7 @@
                         </a:rPr>
                         <a:t>안정성</a:t>
                       </a:r>
-                      <a:endParaRPr sz="1000" b="0">
+                      <a:endParaRPr sz="900" b="0">
                         <a:solidFill>
                           <a:srgbClr val="1F2A44"/>
                         </a:solidFill>
@@ -2499,7 +2499,7 @@
                         </a:lnSpc>
                       </a:pPr>
                       <a:r>
-                        <a:rPr sz="1050" b="0">
+                        <a:rPr sz="900" b="0">
                           <a:solidFill>
                             <a:srgbClr val="1F2A44"/>
                           </a:solidFill>
@@ -2594,7 +2594,7 @@
                         </a:lnSpc>
                       </a:pPr>
                       <a:r>
-                        <a:rPr sz="1000" b="0" err="1">
+                        <a:rPr sz="900" b="0" err="1">
                           <a:solidFill>
                             <a:srgbClr val="1F2A44"/>
                           </a:solidFill>
@@ -2605,7 +2605,7 @@
                         <a:t>보급폰</a:t>
                       </a:r>
                       <a:r>
-                        <a:rPr sz="1000" b="0">
+                        <a:rPr sz="900" b="0">
                           <a:solidFill>
                             <a:srgbClr val="1F2A44"/>
                           </a:solidFill>
@@ -2616,7 +2616,7 @@
                         <a:t> </a:t>
                       </a:r>
                       <a:r>
-                        <a:rPr sz="1000" b="0" err="1">
+                        <a:rPr sz="900" b="0" err="1">
                           <a:solidFill>
                             <a:srgbClr val="1F2A44"/>
                           </a:solidFill>
@@ -2627,7 +2627,7 @@
                         <a:t>탑재</a:t>
                       </a:r>
                       <a:r>
-                        <a:rPr sz="1000" b="0">
+                        <a:rPr sz="900" b="0">
                           <a:solidFill>
                             <a:srgbClr val="1F2A44"/>
                           </a:solidFill>
@@ -2638,7 +2638,7 @@
                         <a:t> </a:t>
                       </a:r>
                       <a:r>
-                        <a:rPr sz="1000" b="0" err="1">
+                        <a:rPr sz="900" b="0" err="1">
                           <a:solidFill>
                             <a:srgbClr val="1F2A44"/>
                           </a:solidFill>
@@ -2648,7 +2648,7 @@
                         </a:rPr>
                         <a:t>가능성</a:t>
                       </a:r>
-                      <a:endParaRPr sz="1000" b="0">
+                      <a:endParaRPr sz="900" b="0">
                         <a:solidFill>
                           <a:srgbClr val="1F2A44"/>
                         </a:solidFill>
@@ -2675,7 +2675,7 @@
                         </a:lnSpc>
                       </a:pPr>
                       <a:r>
-                        <a:rPr sz="1050" b="0">
+                        <a:rPr sz="900" b="0">
                           <a:solidFill>
                             <a:srgbClr val="1F2A44"/>
                           </a:solidFill>
@@ -2686,7 +2686,7 @@
                         <a:t>2GB </a:t>
                       </a:r>
                       <a:r>
-                        <a:rPr sz="1050" b="0" err="1">
+                        <a:rPr sz="900" b="0" err="1">
                           <a:solidFill>
                             <a:srgbClr val="1F2A44"/>
                           </a:solidFill>
@@ -2697,7 +2697,7 @@
                         <a:t>이하</a:t>
                       </a:r>
                       <a:r>
-                        <a:rPr sz="1050" b="0">
+                        <a:rPr sz="900" b="0">
                           <a:solidFill>
                             <a:srgbClr val="1F2A44"/>
                           </a:solidFill>
@@ -2708,7 +2708,7 @@
                         <a:t> </a:t>
                       </a:r>
                       <a:r>
-                        <a:rPr sz="1050" b="0" err="1">
+                        <a:rPr sz="900" b="0" err="1">
                           <a:solidFill>
                             <a:srgbClr val="1F2A44"/>
                           </a:solidFill>
@@ -2718,7 +2718,7 @@
                         </a:rPr>
                         <a:t>권장</a:t>
                       </a:r>
-                      <a:endParaRPr sz="1050" b="0">
+                      <a:endParaRPr sz="900" b="0">
                         <a:solidFill>
                           <a:srgbClr val="1F2A44"/>
                         </a:solidFill>
@@ -2814,7 +2814,7 @@
                         </a:lnSpc>
                       </a:pPr>
                       <a:r>
-                        <a:rPr sz="1000" b="0" err="1">
+                        <a:rPr sz="900" b="0" err="1">
                           <a:solidFill>
                             <a:srgbClr val="1F2A44"/>
                           </a:solidFill>
@@ -2825,7 +2825,7 @@
                         <a:t>실시간</a:t>
                       </a:r>
                       <a:r>
-                        <a:rPr sz="1000" b="0">
+                        <a:rPr sz="900" b="0">
                           <a:solidFill>
                             <a:srgbClr val="1F2A44"/>
                           </a:solidFill>
@@ -2836,7 +2836,7 @@
                         <a:t> </a:t>
                       </a:r>
                       <a:r>
-                        <a:rPr sz="1000" b="0" err="1">
+                        <a:rPr sz="900" b="0" err="1">
                           <a:solidFill>
                             <a:srgbClr val="1F2A44"/>
                           </a:solidFill>
@@ -2847,7 +2847,7 @@
                         <a:t>상담</a:t>
                       </a:r>
                       <a:r>
-                        <a:rPr sz="1000" b="0">
+                        <a:rPr sz="900" b="0">
                           <a:solidFill>
                             <a:srgbClr val="1F2A44"/>
                           </a:solidFill>
@@ -2858,7 +2858,7 @@
                         <a:t> </a:t>
                       </a:r>
                       <a:r>
-                        <a:rPr sz="1000" b="0" err="1">
+                        <a:rPr sz="900" b="0" err="1">
                           <a:solidFill>
                             <a:srgbClr val="1F2A44"/>
                           </a:solidFill>
@@ -2868,7 +2868,7 @@
                         </a:rPr>
                         <a:t>가능성</a:t>
                       </a:r>
-                      <a:endParaRPr sz="1000" b="0">
+                      <a:endParaRPr sz="900" b="0">
                         <a:solidFill>
                           <a:srgbClr val="1F2A44"/>
                         </a:solidFill>
@@ -2895,7 +2895,7 @@
                         </a:lnSpc>
                       </a:pPr>
                       <a:r>
-                        <a:rPr sz="1050" b="0">
+                        <a:rPr sz="900" b="0">
                           <a:solidFill>
                             <a:srgbClr val="1F2A44"/>
                           </a:solidFill>
@@ -2906,7 +2906,7 @@
                         <a:t>15초 </a:t>
                       </a:r>
                       <a:r>
-                        <a:rPr sz="1050" b="0" err="1">
+                        <a:rPr sz="900" b="0" err="1">
                           <a:solidFill>
                             <a:srgbClr val="1F2A44"/>
                           </a:solidFill>
@@ -2916,7 +2916,7 @@
                         </a:rPr>
                         <a:t>이내</a:t>
                       </a:r>
-                      <a:endParaRPr sz="1050" b="0">
+                      <a:endParaRPr sz="900" b="0">
                         <a:solidFill>
                           <a:srgbClr val="1F2A44"/>
                         </a:solidFill>
@@ -2979,7 +2979,7 @@
                         </a:lnSpc>
                       </a:pPr>
                       <a:r>
-                        <a:rPr sz="1000" b="0" err="1">
+                        <a:rPr sz="900" b="0" err="1">
                           <a:solidFill>
                             <a:srgbClr val="1F2A44"/>
                           </a:solidFill>
@@ -2990,7 +2990,7 @@
                         <a:t>줄인</a:t>
                       </a:r>
                       <a:r>
-                        <a:rPr sz="1000" b="0">
+                        <a:rPr sz="900" b="0">
                           <a:solidFill>
                             <a:srgbClr val="1F2A44"/>
                           </a:solidFill>
@@ -3001,7 +3001,7 @@
                         <a:t> 뒤 </a:t>
                       </a:r>
                       <a:r>
-                        <a:rPr sz="1000" b="0" err="1">
+                        <a:rPr sz="900" b="0" err="1">
                           <a:solidFill>
                             <a:srgbClr val="1F2A44"/>
                           </a:solidFill>
@@ -3012,7 +3012,7 @@
                         <a:t>품질</a:t>
                       </a:r>
                       <a:r>
-                        <a:rPr sz="1000" b="0">
+                        <a:rPr sz="900" b="0">
                           <a:solidFill>
                             <a:srgbClr val="1F2A44"/>
                           </a:solidFill>
@@ -3023,7 +3023,7 @@
                         <a:t> </a:t>
                       </a:r>
                       <a:r>
-                        <a:rPr sz="1000" b="0" err="1">
+                        <a:rPr sz="900" b="0" err="1">
                           <a:solidFill>
                             <a:srgbClr val="1F2A44"/>
                           </a:solidFill>
@@ -3034,7 +3034,7 @@
                         <a:t>저하</a:t>
                       </a:r>
                       <a:r>
-                        <a:rPr sz="1000" b="0">
+                        <a:rPr sz="900" b="0">
                           <a:solidFill>
                             <a:srgbClr val="1F2A44"/>
                           </a:solidFill>
@@ -3045,7 +3045,7 @@
                         <a:t> </a:t>
                       </a:r>
                       <a:r>
-                        <a:rPr sz="1000" b="0" err="1">
+                        <a:rPr sz="900" b="0" err="1">
                           <a:solidFill>
                             <a:srgbClr val="1F2A44"/>
                           </a:solidFill>
@@ -3055,7 +3055,7 @@
                         </a:rPr>
                         <a:t>여부</a:t>
                       </a:r>
-                      <a:endParaRPr sz="1000" b="0">
+                      <a:endParaRPr sz="900" b="0">
                         <a:solidFill>
                           <a:srgbClr val="1F2A44"/>
                         </a:solidFill>
@@ -3082,7 +3082,7 @@
                         </a:lnSpc>
                       </a:pPr>
                       <a:r>
-                        <a:rPr sz="1050" b="0" err="1">
+                        <a:rPr sz="900" b="0" err="1">
                           <a:solidFill>
                             <a:srgbClr val="1F2A44"/>
                           </a:solidFill>
@@ -3093,7 +3093,7 @@
                         <a:t>주요</a:t>
                       </a:r>
                       <a:r>
-                        <a:rPr sz="1050" b="0">
+                        <a:rPr sz="900" b="0">
                           <a:solidFill>
                             <a:srgbClr val="1F2A44"/>
                           </a:solidFill>
@@ -3104,7 +3104,7 @@
                         <a:t> </a:t>
                       </a:r>
                       <a:r>
-                        <a:rPr sz="1050" b="0" err="1">
+                        <a:rPr sz="900" b="0" err="1">
                           <a:solidFill>
                             <a:srgbClr val="1F2A44"/>
                           </a:solidFill>
@@ -3115,7 +3115,7 @@
                         <a:t>지표</a:t>
                       </a:r>
                       <a:r>
-                        <a:rPr sz="1050" b="0">
+                        <a:rPr sz="900" b="0">
                           <a:solidFill>
                             <a:srgbClr val="1F2A44"/>
                           </a:solidFill>
@@ -3180,7 +3180,7 @@
                         </a:lnSpc>
                       </a:pPr>
                       <a:r>
-                        <a:rPr sz="1000" b="0">
+                        <a:rPr sz="900" b="0">
                           <a:solidFill>
                             <a:srgbClr val="1F2A44"/>
                           </a:solidFill>
@@ -3191,7 +3191,7 @@
                         <a:t>Teacher </a:t>
                       </a:r>
                       <a:r>
-                        <a:rPr sz="1000" b="0" err="1">
+                        <a:rPr sz="900" b="0" err="1">
                           <a:solidFill>
                             <a:srgbClr val="1F2A44"/>
                           </a:solidFill>
@@ -3202,7 +3202,7 @@
                         <a:t>판단</a:t>
                       </a:r>
                       <a:r>
-                        <a:rPr sz="1000" b="0">
+                        <a:rPr sz="900" b="0">
                           <a:solidFill>
                             <a:srgbClr val="1F2A44"/>
                           </a:solidFill>
@@ -3213,7 +3213,7 @@
                         <a:t> </a:t>
                       </a:r>
                       <a:r>
-                        <a:rPr sz="1000" b="0" err="1">
+                        <a:rPr sz="900" b="0" err="1">
                           <a:solidFill>
                             <a:srgbClr val="1F2A44"/>
                           </a:solidFill>
@@ -3224,7 +3224,7 @@
                         <a:t>방향</a:t>
                       </a:r>
                       <a:r>
-                        <a:rPr sz="1000" b="0">
+                        <a:rPr sz="900" b="0">
                           <a:solidFill>
                             <a:srgbClr val="1F2A44"/>
                           </a:solidFill>
@@ -3235,7 +3235,7 @@
                         <a:t> </a:t>
                       </a:r>
                       <a:r>
-                        <a:rPr sz="1000" b="0" err="1">
+                        <a:rPr sz="900" b="0" err="1">
                           <a:solidFill>
                             <a:srgbClr val="1F2A44"/>
                           </a:solidFill>
@@ -3245,7 +3245,7 @@
                         </a:rPr>
                         <a:t>보존</a:t>
                       </a:r>
-                      <a:endParaRPr sz="1000" b="0">
+                      <a:endParaRPr sz="900" b="0">
                         <a:solidFill>
                           <a:srgbClr val="1F2A44"/>
                         </a:solidFill>
@@ -3272,7 +3272,7 @@
                         </a:lnSpc>
                       </a:pPr>
                       <a:r>
-                        <a:rPr sz="1050" b="0" err="1">
+                        <a:rPr sz="900" b="0" err="1">
                           <a:solidFill>
                             <a:srgbClr val="1F2A44"/>
                           </a:solidFill>
@@ -3283,7 +3283,7 @@
                         <a:t>일반</a:t>
                       </a:r>
                       <a:r>
-                        <a:rPr sz="1050" b="0">
+                        <a:rPr sz="900" b="0">
                           <a:solidFill>
                             <a:srgbClr val="1F2A44"/>
                           </a:solidFill>
@@ -3294,7 +3294,7 @@
                         <a:t> </a:t>
                       </a:r>
                       <a:r>
-                        <a:rPr sz="1050" b="0" err="1">
+                        <a:rPr sz="900" b="0" err="1">
                           <a:solidFill>
                             <a:srgbClr val="1F2A44"/>
                           </a:solidFill>
@@ -3305,7 +3305,7 @@
                         <a:t>문항</a:t>
                       </a:r>
                       <a:r>
-                        <a:rPr sz="1050" b="0">
+                        <a:rPr sz="900" b="0">
                           <a:solidFill>
                             <a:srgbClr val="1F2A44"/>
                           </a:solidFill>
@@ -3370,7 +3370,7 @@
                         </a:lnSpc>
                       </a:pPr>
                       <a:r>
-                        <a:rPr sz="1000" b="0" err="1">
+                        <a:rPr sz="900" b="0" err="1">
                           <a:solidFill>
                             <a:srgbClr val="1F2A44"/>
                           </a:solidFill>
@@ -3381,7 +3381,7 @@
                         <a:t>의료</a:t>
                       </a:r>
                       <a:r>
-                        <a:rPr sz="1000" b="0">
+                        <a:rPr sz="900" b="0">
                           <a:solidFill>
                             <a:srgbClr val="1F2A44"/>
                           </a:solidFill>
@@ -3392,7 +3392,7 @@
                         <a:t> </a:t>
                       </a:r>
                       <a:r>
-                        <a:rPr sz="1000" b="0" err="1">
+                        <a:rPr sz="900" b="0" err="1">
                           <a:solidFill>
                             <a:srgbClr val="1F2A44"/>
                           </a:solidFill>
@@ -3403,7 +3403,7 @@
                         <a:t>핵심</a:t>
                       </a:r>
                       <a:r>
-                        <a:rPr sz="1000" b="0">
+                        <a:rPr sz="900" b="0">
                           <a:solidFill>
                             <a:srgbClr val="1F2A44"/>
                           </a:solidFill>
@@ -3414,7 +3414,7 @@
                         <a:t> </a:t>
                       </a:r>
                       <a:r>
-                        <a:rPr sz="1000" b="0" err="1">
+                        <a:rPr sz="900" b="0" err="1">
                           <a:solidFill>
                             <a:srgbClr val="1F2A44"/>
                           </a:solidFill>
@@ -3425,7 +3425,7 @@
                         <a:t>정보</a:t>
                       </a:r>
                       <a:r>
-                        <a:rPr sz="1000" b="0">
+                        <a:rPr sz="900" b="0">
                           <a:solidFill>
                             <a:srgbClr val="1F2A44"/>
                           </a:solidFill>
@@ -3436,7 +3436,7 @@
                         <a:t> </a:t>
                       </a:r>
                       <a:r>
-                        <a:rPr sz="1000" b="0" err="1">
+                        <a:rPr sz="900" b="0" err="1">
                           <a:solidFill>
                             <a:srgbClr val="1F2A44"/>
                           </a:solidFill>
@@ -3447,7 +3447,7 @@
                         <a:t>누락</a:t>
                       </a:r>
                       <a:r>
-                        <a:rPr sz="1000" b="0">
+                        <a:rPr sz="900" b="0">
                           <a:solidFill>
                             <a:srgbClr val="1F2A44"/>
                           </a:solidFill>
@@ -3458,7 +3458,7 @@
                         <a:t> </a:t>
                       </a:r>
                       <a:r>
-                        <a:rPr sz="1000" b="0" err="1">
+                        <a:rPr sz="900" b="0" err="1">
                           <a:solidFill>
                             <a:srgbClr val="1F2A44"/>
                           </a:solidFill>
@@ -3468,7 +3468,7 @@
                         </a:rPr>
                         <a:t>방지</a:t>
                       </a:r>
-                      <a:endParaRPr sz="1000" b="0">
+                      <a:endParaRPr sz="900" b="0">
                         <a:solidFill>
                           <a:srgbClr val="1F2A44"/>
                         </a:solidFill>
@@ -3495,7 +3495,7 @@
                         </a:lnSpc>
                       </a:pPr>
                       <a:r>
-                        <a:rPr sz="1050" b="0">
+                        <a:rPr sz="900" b="0">
                           <a:solidFill>
                             <a:srgbClr val="1F2A44"/>
                           </a:solidFill>
@@ -3560,7 +3560,7 @@
                         </a:lnSpc>
                       </a:pPr>
                       <a:r>
-                        <a:rPr sz="1000" b="0" err="1">
+                        <a:rPr sz="900" b="0" err="1">
                           <a:solidFill>
                             <a:srgbClr val="1F2A44"/>
                           </a:solidFill>
@@ -3571,7 +3571,7 @@
                         <a:t>온디바이스·오프라인</a:t>
                       </a:r>
                       <a:r>
-                        <a:rPr sz="1000" b="0">
+                        <a:rPr sz="900" b="0">
                           <a:solidFill>
                             <a:srgbClr val="1F2A44"/>
                           </a:solidFill>
@@ -3582,7 +3582,7 @@
                         <a:t> </a:t>
                       </a:r>
                       <a:r>
-                        <a:rPr sz="1000" b="0" err="1">
+                        <a:rPr sz="900" b="0" err="1">
                           <a:solidFill>
                             <a:srgbClr val="1F2A44"/>
                           </a:solidFill>
@@ -3592,7 +3592,7 @@
                         </a:rPr>
                         <a:t>작동</a:t>
                       </a:r>
-                      <a:endParaRPr sz="1000" b="0">
+                      <a:endParaRPr sz="900" b="0">
                         <a:solidFill>
                           <a:srgbClr val="1F2A44"/>
                         </a:solidFill>
@@ -3619,7 +3619,7 @@
                         </a:lnSpc>
                       </a:pPr>
                       <a:r>
-                        <a:rPr sz="1050" b="0">
+                        <a:rPr sz="900" b="0">
                           <a:solidFill>
                             <a:srgbClr val="1F2A44"/>
                           </a:solidFill>
@@ -3661,7 +3661,7 @@
         </p:nvGrpSpPr>
         <p:grpSpPr>
           <a:xfrm>
-            <a:off x="6187598" y="1851214"/>
+            <a:off x="6187598" y="1875278"/>
             <a:ext cx="2670048" cy="896112"/>
             <a:chOff x="3291840" y="1627632"/>
             <a:chExt cx="2670048" cy="896112"/>
@@ -3950,10 +3950,10 @@
       </p:grpSp>
       <p:grpSp>
         <p:nvGrpSpPr>
-          <p:cNvPr id="11" name="그룹 10">
+          <p:cNvPr id="12" name="그룹 11">
             <a:extLst>
               <a:ext uri="{FF2B5EF4-FFF2-40B4-BE49-F238E27FC236}">
-                <a16:creationId xmlns:a16="http://schemas.microsoft.com/office/drawing/2014/main" id="{78840E1F-BAA1-C88C-F71E-86E8792C1FF4}"/>
+                <a16:creationId xmlns:a16="http://schemas.microsoft.com/office/drawing/2014/main" id="{5AD8776C-FEC2-57B1-C6F4-958A650406D6}"/>
               </a:ext>
             </a:extLst>
           </p:cNvPr>
@@ -3962,9 +3962,9 @@
         </p:nvGrpSpPr>
         <p:grpSpPr>
           <a:xfrm>
-            <a:off x="5246538" y="2969670"/>
+            <a:off x="5246538" y="3041862"/>
             <a:ext cx="3209349" cy="3506300"/>
-            <a:chOff x="5246538" y="2969670"/>
+            <a:chOff x="5246538" y="3041862"/>
             <a:chExt cx="3209349" cy="3506300"/>
           </a:xfrm>
         </p:grpSpPr>
@@ -3982,7 +3982,7 @@
           </p:nvSpPr>
           <p:spPr>
             <a:xfrm>
-              <a:off x="5246538" y="2969670"/>
+              <a:off x="5246538" y="3041862"/>
               <a:ext cx="3209349" cy="3506300"/>
             </a:xfrm>
             <a:prstGeom prst="roundRect">
@@ -4035,7 +4035,7 @@
           </p:nvSpPr>
           <p:spPr>
             <a:xfrm>
-              <a:off x="5246538" y="2969670"/>
+              <a:off x="5246538" y="3041862"/>
               <a:ext cx="44575" cy="3506300"/>
             </a:xfrm>
             <a:prstGeom prst="rect">
@@ -4086,7 +4086,7 @@
           </p:nvSpPr>
           <p:spPr>
             <a:xfrm>
-              <a:off x="5353517" y="3096404"/>
+              <a:off x="5353517" y="3204692"/>
               <a:ext cx="3022137" cy="448875"/>
             </a:xfrm>
             <a:prstGeom prst="rect">
@@ -4277,188 +4277,6 @@
         </p:sp>
         <p:sp>
           <p:nvSpPr>
-            <p:cNvPr id="71" name="TextBox 70">
-              <a:extLst>
-                <a:ext uri="{FF2B5EF4-FFF2-40B4-BE49-F238E27FC236}">
-                  <a16:creationId xmlns:a16="http://schemas.microsoft.com/office/drawing/2014/main" id="{5E45A894-BCE8-9343-0E30-BBE111658FAE}"/>
-                </a:ext>
-              </a:extLst>
-            </p:cNvPr>
-            <p:cNvSpPr txBox="1"/>
-            <p:nvPr/>
-          </p:nvSpPr>
-          <p:spPr>
-            <a:xfrm>
-              <a:off x="5353518" y="3711428"/>
-              <a:ext cx="2778898" cy="184731"/>
-            </a:xfrm>
-            <a:prstGeom prst="rect">
-              <a:avLst/>
-            </a:prstGeom>
-            <a:noFill/>
-          </p:spPr>
-          <p:txBody>
-            <a:bodyPr wrap="square" lIns="25400" tIns="12700" rIns="25400" bIns="12700" anchor="t">
-              <a:spAutoFit/>
-            </a:bodyPr>
-            <a:lstStyle/>
-            <a:p>
-              <a:pPr algn="l" eaLnBrk="0" hangingPunct="0">
-                <a:lnSpc>
-                  <a:spcPct val="103000"/>
-                </a:lnSpc>
-                <a:spcBef>
-                  <a:spcPts val="0"/>
-                </a:spcBef>
-                <a:spcAft>
-                  <a:spcPts val="200"/>
-                </a:spcAft>
-              </a:pPr>
-              <a:r>
-                <a:rPr lang="ko-KR" altLang="en-US" sz="1050" b="0">
-                  <a:solidFill>
-                    <a:srgbClr val="5C667A"/>
-                  </a:solidFill>
-                  <a:latin typeface="Pretendard"/>
-                  <a:ea typeface="Pretendard"/>
-                  <a:cs typeface="Pretendard"/>
-                </a:rPr>
-                <a:t>판단 </a:t>
-              </a:r>
-              <a:r>
-                <a:rPr sz="1050" b="0">
-                  <a:solidFill>
-                    <a:srgbClr val="5C667A"/>
-                  </a:solidFill>
-                  <a:latin typeface="Pretendard"/>
-                  <a:ea typeface="Pretendard"/>
-                  <a:cs typeface="Pretendard"/>
-                </a:rPr>
-                <a:t>문항</a:t>
-              </a:r>
-              <a:r>
-                <a:rPr lang="en-US" sz="1050">
-                  <a:solidFill>
-                    <a:srgbClr val="5C667A"/>
-                  </a:solidFill>
-                  <a:latin typeface="Pretendard"/>
-                  <a:ea typeface="Pretendard"/>
-                  <a:cs typeface="Pretendard"/>
-                </a:rPr>
-                <a:t>(</a:t>
-              </a:r>
-              <a:r>
-                <a:rPr lang="ko-KR" altLang="en-US" sz="1050" b="0">
-                  <a:solidFill>
-                    <a:srgbClr val="5C667A"/>
-                  </a:solidFill>
-                  <a:latin typeface="Pretendard"/>
-                  <a:ea typeface="Pretendard"/>
-                  <a:cs typeface="Pretendard"/>
-                </a:rPr>
-                <a:t>약 </a:t>
-              </a:r>
-              <a:r>
-                <a:rPr lang="en-US" altLang="ko-KR" sz="1050" b="0">
-                  <a:solidFill>
-                    <a:srgbClr val="5C667A"/>
-                  </a:solidFill>
-                  <a:latin typeface="Pretendard"/>
-                  <a:ea typeface="Pretendard"/>
-                  <a:cs typeface="Pretendard"/>
-                </a:rPr>
-                <a:t>100</a:t>
-              </a:r>
-              <a:r>
-                <a:rPr sz="1050" b="0">
-                  <a:solidFill>
-                    <a:srgbClr val="5C667A"/>
-                  </a:solidFill>
-                  <a:latin typeface="Pretendard"/>
-                  <a:ea typeface="Pretendard"/>
-                  <a:cs typeface="Pretendard"/>
-                </a:rPr>
-                <a:t>개</a:t>
-              </a:r>
-              <a:r>
-                <a:rPr lang="en-US" sz="1050" b="0">
-                  <a:solidFill>
-                    <a:srgbClr val="5C667A"/>
-                  </a:solidFill>
-                  <a:latin typeface="Pretendard"/>
-                  <a:ea typeface="Pretendard"/>
-                  <a:cs typeface="Pretendard"/>
-                </a:rPr>
-                <a:t>)</a:t>
-              </a:r>
-              <a:r>
-                <a:rPr lang="ko-KR" altLang="en-US" sz="1050" b="0">
-                  <a:solidFill>
-                    <a:srgbClr val="5C667A"/>
-                  </a:solidFill>
-                  <a:latin typeface="Pretendard"/>
-                  <a:ea typeface="Pretendard"/>
-                  <a:cs typeface="Pretendard"/>
-                </a:rPr>
-                <a:t>을 구성해</a:t>
-              </a:r>
-              <a:r>
-                <a:rPr sz="1050" b="0">
-                  <a:solidFill>
-                    <a:srgbClr val="5C667A"/>
-                  </a:solidFill>
-                  <a:latin typeface="Pretendard"/>
-                  <a:ea typeface="Pretendard"/>
-                  <a:cs typeface="Pretendard"/>
-                </a:rPr>
-                <a:t> 위험 답</a:t>
-              </a:r>
-              <a:r>
-                <a:rPr lang="ko-KR" altLang="en-US" sz="1050" b="0">
-                  <a:solidFill>
-                    <a:srgbClr val="5C667A"/>
-                  </a:solidFill>
-                  <a:latin typeface="Pretendard"/>
-                  <a:ea typeface="Pretendard"/>
-                  <a:cs typeface="Pretendard"/>
-                </a:rPr>
-                <a:t>안</a:t>
-              </a:r>
-              <a:r>
-                <a:rPr lang="en-US" sz="1050" b="0">
-                  <a:solidFill>
-                    <a:srgbClr val="5C667A"/>
-                  </a:solidFill>
-                  <a:latin typeface="Pretendard"/>
-                  <a:ea typeface="Pretendard"/>
-                  <a:cs typeface="Pretendard"/>
-                </a:rPr>
-                <a:t> </a:t>
-              </a:r>
-              <a:r>
-                <a:rPr lang="ko-KR" altLang="en-US" sz="1050" b="0">
-                  <a:solidFill>
-                    <a:srgbClr val="5C667A"/>
-                  </a:solidFill>
-                  <a:latin typeface="Pretendard"/>
-                  <a:ea typeface="Pretendard"/>
-                  <a:cs typeface="Pretendard"/>
-                </a:rPr>
-                <a:t>판별</a:t>
-              </a:r>
-              <a:endParaRPr sz="1050" b="0">
-                <a:solidFill>
-                  <a:srgbClr val="5C667A"/>
-                </a:solidFill>
-                <a:latin typeface="Pretendard"/>
-                <a:ea typeface="Pretendard"/>
-                <a:cs typeface="Pretendard"/>
-              </a:endParaRPr>
-            </a:p>
-          </p:txBody>
-        </p:sp>
-        <p:sp>
-          <p:nvSpPr>
             <p:cNvPr id="72" name="Rounded Rectangle 28">
               <a:extLst>
                 <a:ext uri="{FF2B5EF4-FFF2-40B4-BE49-F238E27FC236}">
@@ -4471,7 +4289,7 @@
           </p:nvSpPr>
           <p:spPr>
             <a:xfrm>
-              <a:off x="5353517" y="4106472"/>
+              <a:off x="5353517" y="4034280"/>
               <a:ext cx="2995393" cy="633669"/>
             </a:xfrm>
             <a:prstGeom prst="roundRect">
@@ -4526,7 +4344,7 @@
           </p:nvSpPr>
           <p:spPr>
             <a:xfrm>
-              <a:off x="5428401" y="4159276"/>
+              <a:off x="5428401" y="4087084"/>
               <a:ext cx="2326778" cy="191441"/>
             </a:xfrm>
             <a:prstGeom prst="rect">
@@ -4579,7 +4397,7 @@
           </p:nvSpPr>
           <p:spPr>
             <a:xfrm>
-              <a:off x="5428401" y="4411273"/>
+              <a:off x="5428401" y="4339081"/>
               <a:ext cx="2301888" cy="164148"/>
             </a:xfrm>
             <a:prstGeom prst="rect">
@@ -4739,7 +4557,7 @@
           </p:nvSpPr>
           <p:spPr>
             <a:xfrm>
-              <a:off x="7713279" y="4190961"/>
+              <a:off x="7713279" y="4118769"/>
               <a:ext cx="545589" cy="464690"/>
             </a:xfrm>
             <a:prstGeom prst="roundRect">
@@ -4804,7 +4622,7 @@
           </p:nvSpPr>
           <p:spPr>
             <a:xfrm>
-              <a:off x="5353517" y="4814068"/>
+              <a:off x="5353517" y="4844148"/>
               <a:ext cx="2995393" cy="633669"/>
             </a:xfrm>
             <a:prstGeom prst="roundRect">
@@ -4859,7 +4677,7 @@
           </p:nvSpPr>
           <p:spPr>
             <a:xfrm>
-              <a:off x="5428401" y="4866874"/>
+              <a:off x="5428401" y="4896954"/>
               <a:ext cx="2326778" cy="210186"/>
             </a:xfrm>
             <a:prstGeom prst="rect">
@@ -4942,7 +4760,7 @@
           </p:nvSpPr>
           <p:spPr>
             <a:xfrm>
-              <a:off x="5428401" y="5118870"/>
+              <a:off x="5428401" y="5148950"/>
               <a:ext cx="2130875" cy="164148"/>
             </a:xfrm>
             <a:prstGeom prst="rect">
@@ -5091,7 +4909,7 @@
           </p:nvSpPr>
           <p:spPr>
             <a:xfrm>
-              <a:off x="7713279" y="4898557"/>
+              <a:off x="7713279" y="4928637"/>
               <a:ext cx="545589" cy="464690"/>
             </a:xfrm>
             <a:prstGeom prst="roundRect">
@@ -5156,7 +4974,7 @@
           </p:nvSpPr>
           <p:spPr>
             <a:xfrm>
-              <a:off x="5353517" y="5521665"/>
+              <a:off x="5353517" y="5654017"/>
               <a:ext cx="2995393" cy="633669"/>
             </a:xfrm>
             <a:prstGeom prst="roundRect">
@@ -5211,7 +5029,7 @@
           </p:nvSpPr>
           <p:spPr>
             <a:xfrm>
-              <a:off x="5428401" y="5574471"/>
+              <a:off x="5428401" y="5706823"/>
               <a:ext cx="2326778" cy="191441"/>
             </a:xfrm>
             <a:prstGeom prst="rect">
@@ -5264,8 +5082,8 @@
           </p:nvSpPr>
           <p:spPr>
             <a:xfrm>
-              <a:off x="5428401" y="5826467"/>
-              <a:ext cx="1984793" cy="302647"/>
+              <a:off x="5428401" y="5958819"/>
+              <a:ext cx="2109383" cy="164148"/>
             </a:xfrm>
             <a:prstGeom prst="rect">
               <a:avLst/>
@@ -5334,7 +5152,7 @@
                 <a:t> </a:t>
               </a:r>
               <a:r>
-                <a:rPr sz="900" b="0" err="1">
+                <a:rPr lang="ko-KR" altLang="en-US" sz="900">
                   <a:solidFill>
                     <a:srgbClr val="5C667A"/>
                   </a:solidFill>
@@ -5342,7 +5160,7 @@
                   <a:ea typeface="Pretendard"/>
                   <a:cs typeface="Pretendard"/>
                 </a:rPr>
-                <a:t>의사·약사</a:t>
+                <a:t>전문가 </a:t>
               </a:r>
               <a:r>
                 <a:rPr sz="900" b="0">
@@ -5353,10 +5171,10 @@
                   <a:ea typeface="Pretendard"/>
                   <a:cs typeface="Pretendard"/>
                 </a:rPr>
-                <a:t> </a:t>
-              </a:r>
-              <a:r>
-                <a:rPr sz="900" b="0" err="1">
+                <a:t>상담 안내</a:t>
+              </a:r>
+              <a:r>
+                <a:rPr lang="en-US" sz="900" b="0">
                   <a:solidFill>
                     <a:srgbClr val="5C667A"/>
                   </a:solidFill>
@@ -5364,7 +5182,7 @@
                   <a:ea typeface="Pretendard"/>
                   <a:cs typeface="Pretendard"/>
                 </a:rPr>
-                <a:t>상담·진료</a:t>
+                <a:t> </a:t>
               </a:r>
               <a:r>
                 <a:rPr sz="900" b="0">
@@ -5375,51 +5193,7 @@
                   <a:ea typeface="Pretendard"/>
                   <a:cs typeface="Pretendard"/>
                 </a:rPr>
-                <a:t> 안내</a:t>
-              </a:r>
-              <a:r>
-                <a:rPr lang="ko-KR" altLang="en-US" sz="900">
-                  <a:solidFill>
-                    <a:srgbClr val="5C667A"/>
-                  </a:solidFill>
-                  <a:latin typeface="Pretendard"/>
-                  <a:ea typeface="Pretendard"/>
-                  <a:cs typeface="Pretendard"/>
-                </a:rPr>
-                <a:t>필수</a:t>
-              </a:r>
-              <a:r>
-                <a:rPr sz="900" b="0">
-                  <a:solidFill>
-                    <a:srgbClr val="5C667A"/>
-                  </a:solidFill>
-                  <a:latin typeface="Pretendard"/>
-                  <a:ea typeface="Pretendard"/>
-                  <a:cs typeface="Pretendard"/>
-                </a:rPr>
-                <a:t> </a:t>
-              </a:r>
-              <a:r>
-                <a:rPr sz="900" b="0" err="1">
-                  <a:solidFill>
-                    <a:srgbClr val="5C667A"/>
-                  </a:solidFill>
-                  <a:latin typeface="Pretendard"/>
-                  <a:ea typeface="Pretendard"/>
-                  <a:cs typeface="Pretendard"/>
-                </a:rPr>
-                <a:t>포함</a:t>
-              </a:r>
-              <a:r>
-                <a:rPr sz="900" b="0">
-                  <a:solidFill>
-                    <a:srgbClr val="5C667A"/>
-                  </a:solidFill>
-                  <a:latin typeface="Pretendard"/>
-                  <a:ea typeface="Pretendard"/>
-                  <a:cs typeface="Pretendard"/>
-                </a:rPr>
-                <a:t> </a:t>
+                <a:t>포함 </a:t>
               </a:r>
               <a:r>
                 <a:rPr sz="900" b="0" err="1">
@@ -5457,7 +5231,7 @@
           </p:nvSpPr>
           <p:spPr>
             <a:xfrm>
-              <a:off x="7713279" y="5606154"/>
+              <a:off x="7713279" y="5738506"/>
               <a:ext cx="545589" cy="464690"/>
             </a:xfrm>
             <a:prstGeom prst="roundRect">
@@ -5511,10 +5285,10 @@
       </p:grpSp>
       <p:grpSp>
         <p:nvGrpSpPr>
-          <p:cNvPr id="5" name="그룹 4">
+          <p:cNvPr id="10" name="그룹 9">
             <a:extLst>
               <a:ext uri="{FF2B5EF4-FFF2-40B4-BE49-F238E27FC236}">
-                <a16:creationId xmlns:a16="http://schemas.microsoft.com/office/drawing/2014/main" id="{6B6ECAB0-7D10-5C13-4C6A-FE26F2C2532D}"/>
+                <a16:creationId xmlns:a16="http://schemas.microsoft.com/office/drawing/2014/main" id="{BC9C7C95-1206-4569-6CF1-B04F09479920}"/>
               </a:ext>
             </a:extLst>
           </p:cNvPr>
@@ -5523,9 +5297,9 @@
         </p:nvGrpSpPr>
         <p:grpSpPr>
           <a:xfrm>
-            <a:off x="8563549" y="2969670"/>
+            <a:off x="8563549" y="3041862"/>
             <a:ext cx="3209349" cy="3506300"/>
-            <a:chOff x="8563549" y="2969670"/>
+            <a:chOff x="8563549" y="3041862"/>
             <a:chExt cx="3209349" cy="3506300"/>
           </a:xfrm>
         </p:grpSpPr>
@@ -5543,7 +5317,7 @@
           </p:nvSpPr>
           <p:spPr>
             <a:xfrm>
-              <a:off x="8563549" y="2969670"/>
+              <a:off x="8563549" y="3041862"/>
               <a:ext cx="3209349" cy="3506300"/>
             </a:xfrm>
             <a:prstGeom prst="roundRect">
@@ -5596,7 +5370,7 @@
           </p:nvSpPr>
           <p:spPr>
             <a:xfrm>
-              <a:off x="8563549" y="2969670"/>
+              <a:off x="8563549" y="3041862"/>
               <a:ext cx="44575" cy="3506300"/>
             </a:xfrm>
             <a:prstGeom prst="rect">
@@ -5647,7 +5421,7 @@
           </p:nvSpPr>
           <p:spPr>
             <a:xfrm>
-              <a:off x="8670528" y="3096404"/>
+              <a:off x="8670528" y="3204692"/>
               <a:ext cx="3022137" cy="448875"/>
             </a:xfrm>
             <a:prstGeom prst="rect">
@@ -5816,133 +5590,6 @@
         </p:sp>
         <p:sp>
           <p:nvSpPr>
-            <p:cNvPr id="88" name="TextBox 87">
-              <a:extLst>
-                <a:ext uri="{FF2B5EF4-FFF2-40B4-BE49-F238E27FC236}">
-                  <a16:creationId xmlns:a16="http://schemas.microsoft.com/office/drawing/2014/main" id="{6C93BE0C-633D-0587-F01F-134B73E7D229}"/>
-                </a:ext>
-              </a:extLst>
-            </p:cNvPr>
-            <p:cNvSpPr txBox="1"/>
-            <p:nvPr/>
-          </p:nvSpPr>
-          <p:spPr>
-            <a:xfrm>
-              <a:off x="8670528" y="3711428"/>
-              <a:ext cx="3022137" cy="184731"/>
-            </a:xfrm>
-            <a:prstGeom prst="rect">
-              <a:avLst/>
-            </a:prstGeom>
-            <a:noFill/>
-          </p:spPr>
-          <p:txBody>
-            <a:bodyPr wrap="square" lIns="25400" tIns="12700" rIns="25400" bIns="12700" anchor="t">
-              <a:spAutoFit/>
-            </a:bodyPr>
-            <a:lstStyle/>
-            <a:p>
-              <a:pPr algn="l" eaLnBrk="0" hangingPunct="0">
-                <a:lnSpc>
-                  <a:spcPct val="103000"/>
-                </a:lnSpc>
-                <a:spcBef>
-                  <a:spcPts val="0"/>
-                </a:spcBef>
-                <a:spcAft>
-                  <a:spcPts val="200"/>
-                </a:spcAft>
-              </a:pPr>
-              <a:r>
-                <a:rPr lang="ko-KR" altLang="en-US" sz="1050">
-                  <a:solidFill>
-                    <a:srgbClr val="5C667A"/>
-                  </a:solidFill>
-                  <a:latin typeface="Pretendard"/>
-                  <a:ea typeface="Pretendard"/>
-                  <a:cs typeface="Pretendard"/>
-                </a:rPr>
-                <a:t>시니어</a:t>
-              </a:r>
-              <a:r>
-                <a:rPr sz="1050" b="0">
-                  <a:solidFill>
-                    <a:srgbClr val="5C667A"/>
-                  </a:solidFill>
-                  <a:latin typeface="Pretendard"/>
-                  <a:ea typeface="Pretendard"/>
-                  <a:cs typeface="Pretendard"/>
-                </a:rPr>
-                <a:t> </a:t>
-              </a:r>
-              <a:r>
-                <a:rPr lang="en-US" sz="1050" b="0">
-                  <a:solidFill>
-                    <a:srgbClr val="5C667A"/>
-                  </a:solidFill>
-                  <a:latin typeface="Pretendard"/>
-                  <a:ea typeface="Pretendard"/>
-                  <a:cs typeface="Pretendard"/>
-                </a:rPr>
-                <a:t>5~10</a:t>
-              </a:r>
-              <a:r>
-                <a:rPr sz="1050" b="0">
-                  <a:solidFill>
-                    <a:srgbClr val="5C667A"/>
-                  </a:solidFill>
-                  <a:latin typeface="Pretendard"/>
-                  <a:ea typeface="Pretendard"/>
-                  <a:cs typeface="Pretendard"/>
-                </a:rPr>
-                <a:t>명</a:t>
-              </a:r>
-              <a:r>
-                <a:rPr lang="ko-KR" altLang="en-US" sz="1050" b="0">
-                  <a:solidFill>
-                    <a:srgbClr val="5C667A"/>
-                  </a:solidFill>
-                  <a:latin typeface="Pretendard"/>
-                  <a:ea typeface="Pretendard"/>
-                  <a:cs typeface="Pretendard"/>
-                </a:rPr>
-                <a:t>을 대상으로</a:t>
-              </a:r>
-              <a:r>
-                <a:rPr sz="1050" b="0">
-                  <a:solidFill>
-                    <a:srgbClr val="5C667A"/>
-                  </a:solidFill>
-                  <a:latin typeface="Pretendard"/>
-                  <a:ea typeface="Pretendard"/>
-                  <a:cs typeface="Pretendard"/>
-                </a:rPr>
-                <a:t> </a:t>
-              </a:r>
-              <a:r>
-                <a:rPr lang="ko-KR" altLang="en-US" sz="1050" b="0">
-                  <a:solidFill>
-                    <a:srgbClr val="5C667A"/>
-                  </a:solidFill>
-                  <a:latin typeface="Pretendard"/>
-                  <a:ea typeface="Pretendard"/>
-                  <a:cs typeface="Pretendard"/>
-                </a:rPr>
-                <a:t>다음 항목을 평가</a:t>
-              </a:r>
-              <a:endParaRPr sz="1050" b="0">
-                <a:solidFill>
-                  <a:srgbClr val="5C667A"/>
-                </a:solidFill>
-                <a:latin typeface="Pretendard"/>
-                <a:ea typeface="Pretendard"/>
-                <a:cs typeface="Pretendard"/>
-              </a:endParaRPr>
-            </a:p>
-          </p:txBody>
-        </p:sp>
-        <p:sp>
-          <p:nvSpPr>
             <p:cNvPr id="89" name="Rounded Rectangle 45">
               <a:extLst>
                 <a:ext uri="{FF2B5EF4-FFF2-40B4-BE49-F238E27FC236}">
@@ -5955,7 +5602,7 @@
           </p:nvSpPr>
           <p:spPr>
             <a:xfrm>
-              <a:off x="8670528" y="4106472"/>
+              <a:off x="8670528" y="4034280"/>
               <a:ext cx="2995393" cy="633669"/>
             </a:xfrm>
             <a:prstGeom prst="roundRect">
@@ -6010,7 +5657,7 @@
           </p:nvSpPr>
           <p:spPr>
             <a:xfrm>
-              <a:off x="8745412" y="4159276"/>
+              <a:off x="8745412" y="4087084"/>
               <a:ext cx="2326778" cy="191441"/>
             </a:xfrm>
             <a:prstGeom prst="rect">
@@ -6063,8 +5710,8 @@
           </p:nvSpPr>
           <p:spPr>
             <a:xfrm>
-              <a:off x="8745412" y="4411273"/>
-              <a:ext cx="2161186" cy="302647"/>
+              <a:off x="8745412" y="4339081"/>
+              <a:ext cx="2161186" cy="164148"/>
             </a:xfrm>
             <a:prstGeom prst="rect">
               <a:avLst/>
@@ -6157,29 +5804,7 @@
                   <a:ea typeface="Pretendard"/>
                   <a:cs typeface="Pretendard"/>
                 </a:rPr>
-                <a:t>지금 할 일</a:t>
-              </a:r>
-              <a:r>
-                <a:rPr lang="en-US" altLang="ko-KR" sz="900">
-                  <a:solidFill>
-                    <a:srgbClr val="5C667A"/>
-                  </a:solidFill>
-                  <a:latin typeface="Pretendard"/>
-                  <a:ea typeface="Pretendard"/>
-                  <a:cs typeface="Pretendard"/>
-                </a:rPr>
-                <a:t>·</a:t>
-              </a:r>
-              <a:r>
-                <a:rPr lang="ko-KR" altLang="en-US" sz="900">
-                  <a:solidFill>
-                    <a:srgbClr val="5C667A"/>
-                  </a:solidFill>
-                  <a:latin typeface="Pretendard"/>
-                  <a:ea typeface="Pretendard"/>
-                  <a:cs typeface="Pretendard"/>
-                </a:rPr>
-                <a:t>병원 갈 조건을 인지하셨는지</a:t>
+                <a:t>할 일을 인지하셨는지</a:t>
               </a:r>
               <a:endParaRPr sz="900" b="0">
                 <a:solidFill>
@@ -6206,7 +5831,7 @@
           </p:nvSpPr>
           <p:spPr>
             <a:xfrm>
-              <a:off x="11013575" y="4190961"/>
+              <a:off x="11013575" y="4118769"/>
               <a:ext cx="545589" cy="464690"/>
             </a:xfrm>
             <a:prstGeom prst="roundRect">
@@ -6293,7 +5918,7 @@
           </p:nvSpPr>
           <p:spPr>
             <a:xfrm>
-              <a:off x="8670528" y="5515368"/>
+              <a:off x="8670528" y="5647720"/>
               <a:ext cx="2995393" cy="633669"/>
             </a:xfrm>
             <a:prstGeom prst="roundRect">
@@ -6348,7 +5973,7 @@
           </p:nvSpPr>
           <p:spPr>
             <a:xfrm>
-              <a:off x="8745412" y="5568174"/>
+              <a:off x="8745412" y="5700526"/>
               <a:ext cx="2326778" cy="210186"/>
             </a:xfrm>
             <a:prstGeom prst="rect">
@@ -6409,7 +6034,7 @@
           </p:nvSpPr>
           <p:spPr>
             <a:xfrm>
-              <a:off x="8745412" y="5820170"/>
+              <a:off x="8745412" y="5952522"/>
               <a:ext cx="2233404" cy="164148"/>
             </a:xfrm>
             <a:prstGeom prst="rect">
@@ -6470,7 +6095,7 @@
           </p:nvSpPr>
           <p:spPr>
             <a:xfrm>
-              <a:off x="11013575" y="5599857"/>
+              <a:off x="11013575" y="5732209"/>
               <a:ext cx="545589" cy="464690"/>
             </a:xfrm>
             <a:prstGeom prst="roundRect">
@@ -6576,7 +6201,7 @@
           </p:nvSpPr>
           <p:spPr>
             <a:xfrm>
-              <a:off x="8670528" y="4809112"/>
+              <a:off x="8670528" y="4839192"/>
               <a:ext cx="2995393" cy="633669"/>
             </a:xfrm>
             <a:prstGeom prst="roundRect">
@@ -6631,7 +6256,7 @@
           </p:nvSpPr>
           <p:spPr>
             <a:xfrm>
-              <a:off x="8745412" y="4861918"/>
+              <a:off x="8745412" y="4891998"/>
               <a:ext cx="2326778" cy="211725"/>
             </a:xfrm>
             <a:prstGeom prst="rect">
@@ -6665,7 +6290,7 @@
                   <a:ea typeface="Pretendard SemiBold"/>
                   <a:cs typeface="Pretendard SemiBold"/>
                 </a:rPr>
-                <a:t>후속 행동 이해</a:t>
+                <a:t>답변 이해</a:t>
               </a:r>
               <a:endParaRPr sz="1200" b="1">
                 <a:solidFill>
@@ -6692,8 +6317,8 @@
           </p:nvSpPr>
           <p:spPr>
             <a:xfrm>
-              <a:off x="8745412" y="5113914"/>
-              <a:ext cx="2161186" cy="302647"/>
+              <a:off x="8745412" y="5143994"/>
+              <a:ext cx="2161186" cy="164148"/>
             </a:xfrm>
             <a:prstGeom prst="rect">
               <a:avLst/>
@@ -6720,7 +6345,7 @@
                   <a:ea typeface="Pretendard"/>
                   <a:cs typeface="Pretendard"/>
                 </a:rPr>
-                <a:t>응답을 보고 다음 행동을 맞게 고르거나 되말하는지</a:t>
+                <a:t>응답을 보고 정답을 맞게 고르시는지</a:t>
               </a:r>
             </a:p>
           </p:txBody>
@@ -6739,7 +6364,7 @@
           </p:nvSpPr>
           <p:spPr>
             <a:xfrm>
-              <a:off x="11013575" y="4893601"/>
+              <a:off x="11013575" y="4923681"/>
               <a:ext cx="545589" cy="464690"/>
             </a:xfrm>
             <a:prstGeom prst="roundRect">
@@ -6846,7 +6471,7 @@
         </p:nvSpPr>
         <p:spPr>
           <a:xfrm>
-            <a:off x="460808" y="2969670"/>
+            <a:off x="460808" y="3041862"/>
             <a:ext cx="42056" cy="3506300"/>
           </a:xfrm>
           <a:prstGeom prst="rect">
@@ -7194,7 +6819,7 @@
         </p:nvSpPr>
         <p:spPr>
           <a:xfrm>
-            <a:off x="602147" y="3096404"/>
+            <a:off x="602147" y="3168596"/>
             <a:ext cx="3022137" cy="240963"/>
           </a:xfrm>
           <a:prstGeom prst="rect">
@@ -9234,7 +8859,7 @@
           <p:spPr>
             <a:xfrm>
               <a:off x="7172387" y="4682877"/>
-              <a:ext cx="4206892" cy="262231"/>
+              <a:ext cx="4206892" cy="225575"/>
             </a:xfrm>
             <a:prstGeom prst="rect">
               <a:avLst/>
@@ -9247,13 +8872,10 @@
             </a:bodyPr>
             <a:lstStyle/>
             <a:p>
-              <a:pPr algn="l">
+              <a:pPr>
                 <a:lnSpc>
                   <a:spcPct val="105000"/>
                 </a:lnSpc>
-                <a:spcBef>
-                  <a:spcPts val="0"/>
-                </a:spcBef>
                 <a:spcAft>
                   <a:spcPts val="200"/>
                 </a:spcAft>
@@ -9303,7 +8925,7 @@
                 <a:t> (팀 · </a:t>
               </a:r>
               <a:r>
-                <a:rPr sz="1300" b="1" err="1">
+                <a:rPr lang="ko-KR" altLang="en-US" sz="1300" b="1">
                   <a:solidFill>
                     <a:srgbClr val="17213B"/>
                   </a:solidFill>
@@ -9311,10 +8933,10 @@
                   <a:ea typeface="Pretendard SemiBold"/>
                   <a:cs typeface="Pretendard SemiBold"/>
                 </a:rPr>
-                <a:t>전문가</a:t>
-              </a:r>
-              <a:r>
-                <a:rPr sz="1300" b="1">
+                <a:t>시니어 </a:t>
+              </a:r>
+              <a:r>
+                <a:rPr lang="en-US" altLang="ko-KR" sz="1300" b="1">
                   <a:solidFill>
                     <a:srgbClr val="17213B"/>
                   </a:solidFill>
@@ -9322,7 +8944,18 @@
                   <a:ea typeface="Pretendard SemiBold"/>
                   <a:cs typeface="Pretendard SemiBold"/>
                 </a:rPr>
-                <a:t>)</a:t>
+                <a:t>· </a:t>
+              </a:r>
+              <a:r>
+                <a:rPr sz="1300" b="1">
+                  <a:solidFill>
+                    <a:srgbClr val="17213B"/>
+                  </a:solidFill>
+                  <a:latin typeface="Pretendard SemiBold"/>
+                  <a:ea typeface="Pretendard SemiBold"/>
+                  <a:cs typeface="Pretendard SemiBold"/>
+                </a:rPr>
+                <a:t>전문가)</a:t>
               </a:r>
             </a:p>
           </p:txBody>
@@ -9551,14 +9184,14 @@
           <p:nvPr>
             <p:extLst>
               <p:ext uri="{D42A27DB-BD31-4B8C-83A1-F6EECF244321}">
-                <p14:modId xmlns:p14="http://schemas.microsoft.com/office/powerpoint/2010/main" val="2532819945"/>
+                <p14:modId xmlns:p14="http://schemas.microsoft.com/office/powerpoint/2010/main" val="10705412"/>
               </p:ext>
             </p:extLst>
           </p:nvPr>
         </p:nvGraphicFramePr>
         <p:xfrm>
-          <a:off x="694972" y="2609850"/>
-          <a:ext cx="4854512" cy="3299608"/>
+          <a:off x="640828" y="2609850"/>
+          <a:ext cx="5044091" cy="3299608"/>
         </p:xfrm>
         <a:graphic>
           <a:graphicData uri="http://schemas.openxmlformats.org/drawingml/2006/table">
@@ -9574,7 +9207,7 @@
                     </a:ext>
                   </a:extLst>
                 </a:gridCol>
-                <a:gridCol w="3459376">
+                <a:gridCol w="3648955">
                   <a:extLst>
                     <a:ext uri="{9D8B030D-6E8A-4147-A177-3AD203B41FA5}">
                       <a16:colId xmlns:a16="http://schemas.microsoft.com/office/drawing/2014/main" val="20001"/>
@@ -9858,7 +9491,7 @@
                         </a:spcBef>
                       </a:pPr>
                       <a:r>
-                        <a:rPr lang="en-US" altLang="ko-KR" sz="1050">
+                        <a:rPr lang="en-US" altLang="ko-KR" sz="900">
                           <a:solidFill>
                             <a:srgbClr val="4B5563"/>
                           </a:solidFill>
@@ -9869,7 +9502,7 @@
                         <a:t>- </a:t>
                       </a:r>
                       <a:r>
-                        <a:rPr lang="ko-KR" altLang="en-US" sz="1050">
+                        <a:rPr lang="ko-KR" altLang="en-US" sz="900">
                           <a:solidFill>
                             <a:srgbClr val="4B5563"/>
                           </a:solidFill>
@@ -9879,7 +9512,7 @@
                         </a:rPr>
                         <a:t>응급 · 복약 · 만성질환 · 증상 · 생활 · 진단 </a:t>
                       </a:r>
-                      <a:endParaRPr lang="en-US" altLang="ko-KR" sz="1050">
+                      <a:endParaRPr lang="en-US" altLang="ko-KR" sz="900">
                         <a:solidFill>
                           <a:srgbClr val="4B5563"/>
                         </a:solidFill>
@@ -9898,7 +9531,7 @@
                         </a:spcBef>
                       </a:pPr>
                       <a:r>
-                        <a:rPr lang="en-US" altLang="ko-KR" sz="1050">
+                        <a:rPr lang="en-US" altLang="ko-KR" sz="900">
                           <a:solidFill>
                             <a:srgbClr val="4B5563"/>
                           </a:solidFill>
@@ -9909,7 +9542,7 @@
                         <a:t>- </a:t>
                       </a:r>
                       <a:r>
-                        <a:rPr lang="ko-KR" altLang="en-US" sz="1050">
+                        <a:rPr lang="ko-KR" altLang="en-US" sz="900">
                           <a:solidFill>
                             <a:srgbClr val="4B5563"/>
                           </a:solidFill>
@@ -9920,7 +9553,7 @@
                         <a:t>정상</a:t>
                       </a:r>
                       <a:r>
-                        <a:rPr lang="en-US" altLang="ko-KR" sz="1050">
+                        <a:rPr lang="en-US" altLang="ko-KR" sz="900">
                           <a:solidFill>
                             <a:srgbClr val="4B5563"/>
                           </a:solidFill>
@@ -9931,7 +9564,7 @@
                         <a:t>·</a:t>
                       </a:r>
                       <a:r>
-                        <a:rPr lang="ko-KR" altLang="en-US" sz="1050">
+                        <a:rPr lang="ko-KR" altLang="en-US" sz="900">
                           <a:solidFill>
                             <a:srgbClr val="4B5563"/>
                           </a:solidFill>
@@ -9942,7 +9575,7 @@
                         <a:t>경계</a:t>
                       </a:r>
                       <a:r>
-                        <a:rPr lang="en-US" altLang="ko-KR" sz="1050">
+                        <a:rPr lang="en-US" altLang="ko-KR" sz="900">
                           <a:solidFill>
                             <a:srgbClr val="4B5563"/>
                           </a:solidFill>
@@ -9953,7 +9586,7 @@
                         <a:t>·</a:t>
                       </a:r>
                       <a:r>
-                        <a:rPr lang="ko-KR" altLang="en-US" sz="1050">
+                        <a:rPr lang="ko-KR" altLang="en-US" sz="900">
                           <a:solidFill>
                             <a:srgbClr val="4B5563"/>
                           </a:solidFill>
@@ -9964,7 +9597,7 @@
                         <a:t>위험</a:t>
                       </a:r>
                       <a:r>
-                        <a:rPr lang="en-US" altLang="ko-KR" sz="1050">
+                        <a:rPr lang="en-US" altLang="ko-KR" sz="900">
                           <a:solidFill>
                             <a:srgbClr val="4B5563"/>
                           </a:solidFill>
@@ -9975,7 +9608,7 @@
                         <a:t>·</a:t>
                       </a:r>
                       <a:r>
-                        <a:rPr lang="ko-KR" altLang="en-US" sz="1050">
+                        <a:rPr lang="ko-KR" altLang="en-US" sz="900">
                           <a:solidFill>
                             <a:srgbClr val="4B5563"/>
                           </a:solidFill>
@@ -9986,7 +9619,7 @@
                         <a:t>정보 부족</a:t>
                       </a:r>
                       <a:r>
-                        <a:rPr lang="en-US" altLang="ko-KR" sz="1050">
+                        <a:rPr lang="en-US" altLang="ko-KR" sz="900">
                           <a:solidFill>
                             <a:srgbClr val="4B5563"/>
                           </a:solidFill>
@@ -9997,7 +9630,7 @@
                         <a:t>·</a:t>
                       </a:r>
                       <a:r>
-                        <a:rPr lang="ko-KR" altLang="en-US" sz="1050">
+                        <a:rPr lang="ko-KR" altLang="en-US" sz="900">
                           <a:solidFill>
                             <a:srgbClr val="4B5563"/>
                           </a:solidFill>
